--- a/chapter-03/FIN1209-Chapter-03-Student-Edition.pptx
+++ b/chapter-03/FIN1209-Chapter-03-Student-Edition.pptx
@@ -20016,8 +20016,8 @@
         </p:nvSpPr>
         <p:spPr>
           <a:xfrm>
-            <a:off x="2346807" y="1810512"/>
-            <a:ext cx="7498079" cy="3749039"/>
+            <a:off x="778611" y="1810512"/>
+            <a:ext cx="10634472" cy="3749039"/>
           </a:xfrm>
           <a:prstGeom prst="rect">
             <a:avLst/>
@@ -20040,128 +20040,33 @@
           </a:p>
         </p:txBody>
       </p:sp>
-      <p:sp>
-        <p:nvSpPr>
-          <p:cNvPr id="8" name="Rectangle 7"/>
-          <p:cNvSpPr/>
-          <p:nvPr/>
-        </p:nvSpPr>
-        <p:spPr>
-          <a:xfrm>
-            <a:off x="2346807" y="1810512"/>
-            <a:ext cx="7498079" cy="50800"/>
-          </a:xfrm>
-          <a:prstGeom prst="rect">
-            <a:avLst/>
-          </a:prstGeom>
-          <a:solidFill>
-            <a:srgbClr val="F2A900"/>
-          </a:solidFill>
-          <a:ln>
-            <a:noFill/>
-          </a:ln>
-          <a:effectLst/>
-        </p:spPr>
-        <p:txBody>
-          <a:bodyPr rtlCol="0" anchor="ctr"/>
-          <a:lstStyle/>
-          <a:p>
-            <a:pPr algn="ctr"/>
-          </a:p>
-        </p:txBody>
-      </p:sp>
+      <p:pic>
+        <p:nvPicPr>
+          <p:cNvPr id="8" name="Picture 7" descr="chart-f.png"/>
+          <p:cNvPicPr>
+            <a:picLocks noChangeAspect="1"/>
+          </p:cNvPicPr>
+          <p:nvPr/>
+        </p:nvPicPr>
+        <p:blipFill>
+          <a:blip r:embed="rId2"/>
+          <a:stretch>
+            <a:fillRect/>
+          </a:stretch>
+        </p:blipFill>
+        <p:spPr>
+          <a:xfrm>
+            <a:off x="897483" y="1929384"/>
+            <a:ext cx="10396728" cy="3511296"/>
+          </a:xfrm>
+          <a:prstGeom prst="rect">
+            <a:avLst/>
+          </a:prstGeom>
+        </p:spPr>
+      </p:pic>
       <p:sp>
         <p:nvSpPr>
           <p:cNvPr id="9" name="TextBox 8"/>
-          <p:cNvSpPr txBox="1"/>
-          <p:nvPr/>
-        </p:nvSpPr>
-        <p:spPr>
-          <a:xfrm>
-            <a:off x="2895447" y="2450591"/>
-            <a:ext cx="6400799" cy="2651759"/>
-          </a:xfrm>
-          <a:prstGeom prst="rect">
-            <a:avLst/>
-          </a:prstGeom>
-          <a:noFill/>
-        </p:spPr>
-        <p:txBody>
-          <a:bodyPr wrap="square" anchor="t" lIns="0" rIns="0" tIns="0" bIns="0">
-            <a:spAutoFit/>
-          </a:bodyPr>
-          <a:lstStyle/>
-          <a:p>
-            <a:pPr algn="l">
-              <a:lnSpc>
-                <a:spcPct val="100000"/>
-              </a:lnSpc>
-              <a:spcBef>
-                <a:spcPts val="0"/>
-              </a:spcBef>
-              <a:spcAft>
-                <a:spcPts val="1400"/>
-              </a:spcAft>
-            </a:pPr>
-            <a:r>
-              <a:rPr sz="1500" b="1" i="0">
-                <a:solidFill>
-                  <a:srgbClr val="818181"/>
-                </a:solidFill>
-                <a:latin typeface="Arial"/>
-              </a:rPr>
-              <a:t>CHART F</a:t>
-            </a:r>
-          </a:p>
-          <a:p>
-            <a:pPr algn="l">
-              <a:lnSpc>
-                <a:spcPct val="120000"/>
-              </a:lnSpc>
-              <a:spcBef>
-                <a:spcPts val="0"/>
-              </a:spcBef>
-              <a:spcAft>
-                <a:spcPts val="1800"/>
-              </a:spcAft>
-            </a:pPr>
-            <a:r>
-              <a:rPr sz="2200" b="0" i="0">
-                <a:solidFill>
-                  <a:srgbClr val="1A1A1A"/>
-                </a:solidFill>
-                <a:latin typeface="Palatino"/>
-              </a:rPr>
-              <a:t>Contracts joined end to end, each new one at a discount to the last, and the same string back adjusted into one continuous line whose earliest prices fall below zero.</a:t>
-            </a:r>
-          </a:p>
-          <a:p>
-            <a:pPr algn="l">
-              <a:lnSpc>
-                <a:spcPct val="115000"/>
-              </a:lnSpc>
-              <a:spcBef>
-                <a:spcPts val="0"/>
-              </a:spcBef>
-              <a:spcAft>
-                <a:spcPts val="0"/>
-              </a:spcAft>
-            </a:pPr>
-            <a:r>
-              <a:rPr sz="1400" b="0" i="1">
-                <a:solidFill>
-                  <a:srgbClr val="818181"/>
-                </a:solidFill>
-                <a:latin typeface="Arial"/>
-              </a:rPr>
-              <a:t>This chart is generated by build/chartkit.py and was not drawn for this build. Rerun the build to place it.</a:t>
-            </a:r>
-          </a:p>
-        </p:txBody>
-      </p:sp>
-      <p:sp>
-        <p:nvSpPr>
-          <p:cNvPr id="10" name="TextBox 9"/>
           <p:cNvSpPr txBox="1"/>
           <p:nvPr/>
         </p:nvSpPr>
@@ -33280,8 +33185,8 @@
         </p:nvSpPr>
         <p:spPr>
           <a:xfrm>
-            <a:off x="2346807" y="1810512"/>
-            <a:ext cx="7498079" cy="3749039"/>
+            <a:off x="778611" y="1810512"/>
+            <a:ext cx="10634472" cy="3749039"/>
           </a:xfrm>
           <a:prstGeom prst="rect">
             <a:avLst/>
@@ -33304,128 +33209,33 @@
           </a:p>
         </p:txBody>
       </p:sp>
-      <p:sp>
-        <p:nvSpPr>
-          <p:cNvPr id="8" name="Rectangle 7"/>
-          <p:cNvSpPr/>
-          <p:nvPr/>
-        </p:nvSpPr>
-        <p:spPr>
-          <a:xfrm>
-            <a:off x="2346807" y="1810512"/>
-            <a:ext cx="7498079" cy="50800"/>
-          </a:xfrm>
-          <a:prstGeom prst="rect">
-            <a:avLst/>
-          </a:prstGeom>
-          <a:solidFill>
-            <a:srgbClr val="F2A900"/>
-          </a:solidFill>
-          <a:ln>
-            <a:noFill/>
-          </a:ln>
-          <a:effectLst/>
-        </p:spPr>
-        <p:txBody>
-          <a:bodyPr rtlCol="0" anchor="ctr"/>
-          <a:lstStyle/>
-          <a:p>
-            <a:pPr algn="ctr"/>
-          </a:p>
-        </p:txBody>
-      </p:sp>
+      <p:pic>
+        <p:nvPicPr>
+          <p:cNvPr id="8" name="Picture 7" descr="chart-a.png"/>
+          <p:cNvPicPr>
+            <a:picLocks noChangeAspect="1"/>
+          </p:cNvPicPr>
+          <p:nvPr/>
+        </p:nvPicPr>
+        <p:blipFill>
+          <a:blip r:embed="rId2"/>
+          <a:stretch>
+            <a:fillRect/>
+          </a:stretch>
+        </p:blipFill>
+        <p:spPr>
+          <a:xfrm>
+            <a:off x="897483" y="1929384"/>
+            <a:ext cx="10396728" cy="3511296"/>
+          </a:xfrm>
+          <a:prstGeom prst="rect">
+            <a:avLst/>
+          </a:prstGeom>
+        </p:spPr>
+      </p:pic>
       <p:sp>
         <p:nvSpPr>
           <p:cNvPr id="9" name="TextBox 8"/>
-          <p:cNvSpPr txBox="1"/>
-          <p:nvPr/>
-        </p:nvSpPr>
-        <p:spPr>
-          <a:xfrm>
-            <a:off x="2895447" y="2450591"/>
-            <a:ext cx="6400799" cy="2651759"/>
-          </a:xfrm>
-          <a:prstGeom prst="rect">
-            <a:avLst/>
-          </a:prstGeom>
-          <a:noFill/>
-        </p:spPr>
-        <p:txBody>
-          <a:bodyPr wrap="square" anchor="t" lIns="0" rIns="0" tIns="0" bIns="0">
-            <a:spAutoFit/>
-          </a:bodyPr>
-          <a:lstStyle/>
-          <a:p>
-            <a:pPr algn="l">
-              <a:lnSpc>
-                <a:spcPct val="100000"/>
-              </a:lnSpc>
-              <a:spcBef>
-                <a:spcPts val="0"/>
-              </a:spcBef>
-              <a:spcAft>
-                <a:spcPts val="1400"/>
-              </a:spcAft>
-            </a:pPr>
-            <a:r>
-              <a:rPr sz="1500" b="1" i="0">
-                <a:solidFill>
-                  <a:srgbClr val="818181"/>
-                </a:solidFill>
-                <a:latin typeface="Arial"/>
-              </a:rPr>
-              <a:t>CHART A</a:t>
-            </a:r>
-          </a:p>
-          <a:p>
-            <a:pPr algn="l">
-              <a:lnSpc>
-                <a:spcPct val="120000"/>
-              </a:lnSpc>
-              <a:spcBef>
-                <a:spcPts val="0"/>
-              </a:spcBef>
-              <a:spcAft>
-                <a:spcPts val="1800"/>
-              </a:spcAft>
-            </a:pPr>
-            <a:r>
-              <a:rPr sz="2200" b="0" i="0">
-                <a:solidFill>
-                  <a:srgbClr val="1A1A1A"/>
-                </a:solidFill>
-                <a:latin typeface="Palatino"/>
-              </a:rPr>
-              <a:t>Two bars in pesos, the first with a high of 104 and a close of 102, the second opening at 106 with a low of 105.50, and the four gaps measured between them: 4, 2, 1.50 and 3.50.</a:t>
-            </a:r>
-          </a:p>
-          <a:p>
-            <a:pPr algn="l">
-              <a:lnSpc>
-                <a:spcPct val="115000"/>
-              </a:lnSpc>
-              <a:spcBef>
-                <a:spcPts val="0"/>
-              </a:spcBef>
-              <a:spcAft>
-                <a:spcPts val="0"/>
-              </a:spcAft>
-            </a:pPr>
-            <a:r>
-              <a:rPr sz="1400" b="0" i="1">
-                <a:solidFill>
-                  <a:srgbClr val="818181"/>
-                </a:solidFill>
-                <a:latin typeface="Arial"/>
-              </a:rPr>
-              <a:t>This chart is generated by build/chartkit.py and was not drawn for this build. Rerun the build to place it.</a:t>
-            </a:r>
-          </a:p>
-        </p:txBody>
-      </p:sp>
-      <p:sp>
-        <p:nvSpPr>
-          <p:cNvPr id="10" name="TextBox 9"/>
           <p:cNvSpPr txBox="1"/>
           <p:nvPr/>
         </p:nvSpPr>
@@ -38740,8 +38550,8 @@
         </p:nvSpPr>
         <p:spPr>
           <a:xfrm>
-            <a:off x="2346807" y="1810512"/>
-            <a:ext cx="7498079" cy="3749039"/>
+            <a:off x="778611" y="1810512"/>
+            <a:ext cx="10634472" cy="3749039"/>
           </a:xfrm>
           <a:prstGeom prst="rect">
             <a:avLst/>
@@ -38764,128 +38574,33 @@
           </a:p>
         </p:txBody>
       </p:sp>
-      <p:sp>
-        <p:nvSpPr>
-          <p:cNvPr id="8" name="Rectangle 7"/>
-          <p:cNvSpPr/>
-          <p:nvPr/>
-        </p:nvSpPr>
-        <p:spPr>
-          <a:xfrm>
-            <a:off x="2346807" y="1810512"/>
-            <a:ext cx="7498079" cy="50800"/>
-          </a:xfrm>
-          <a:prstGeom prst="rect">
-            <a:avLst/>
-          </a:prstGeom>
-          <a:solidFill>
-            <a:srgbClr val="F2A900"/>
-          </a:solidFill>
-          <a:ln>
-            <a:noFill/>
-          </a:ln>
-          <a:effectLst/>
-        </p:spPr>
-        <p:txBody>
-          <a:bodyPr rtlCol="0" anchor="ctr"/>
-          <a:lstStyle/>
-          <a:p>
-            <a:pPr algn="ctr"/>
-          </a:p>
-        </p:txBody>
-      </p:sp>
+      <p:pic>
+        <p:nvPicPr>
+          <p:cNvPr id="8" name="Picture 7" descr="chart-b.png"/>
+          <p:cNvPicPr>
+            <a:picLocks noChangeAspect="1"/>
+          </p:cNvPicPr>
+          <p:nvPr/>
+        </p:nvPicPr>
+        <p:blipFill>
+          <a:blip r:embed="rId2"/>
+          <a:stretch>
+            <a:fillRect/>
+          </a:stretch>
+        </p:blipFill>
+        <p:spPr>
+          <a:xfrm>
+            <a:off x="897483" y="1929384"/>
+            <a:ext cx="10396728" cy="3511296"/>
+          </a:xfrm>
+          <a:prstGeom prst="rect">
+            <a:avLst/>
+          </a:prstGeom>
+        </p:spPr>
+      </p:pic>
       <p:sp>
         <p:nvSpPr>
           <p:cNvPr id="9" name="TextBox 8"/>
-          <p:cNvSpPr txBox="1"/>
-          <p:nvPr/>
-        </p:nvSpPr>
-        <p:spPr>
-          <a:xfrm>
-            <a:off x="2895447" y="2450591"/>
-            <a:ext cx="6400799" cy="2651759"/>
-          </a:xfrm>
-          <a:prstGeom prst="rect">
-            <a:avLst/>
-          </a:prstGeom>
-          <a:noFill/>
-        </p:spPr>
-        <p:txBody>
-          <a:bodyPr wrap="square" anchor="t" lIns="0" rIns="0" tIns="0" bIns="0">
-            <a:spAutoFit/>
-          </a:bodyPr>
-          <a:lstStyle/>
-          <a:p>
-            <a:pPr algn="l">
-              <a:lnSpc>
-                <a:spcPct val="100000"/>
-              </a:lnSpc>
-              <a:spcBef>
-                <a:spcPts val="0"/>
-              </a:spcBef>
-              <a:spcAft>
-                <a:spcPts val="1400"/>
-              </a:spcAft>
-            </a:pPr>
-            <a:r>
-              <a:rPr sz="1500" b="1" i="0">
-                <a:solidFill>
-                  <a:srgbClr val="818181"/>
-                </a:solidFill>
-                <a:latin typeface="Arial"/>
-              </a:rPr>
-              <a:t>CHART B</a:t>
-            </a:r>
-          </a:p>
-          <a:p>
-            <a:pPr algn="l">
-              <a:lnSpc>
-                <a:spcPct val="120000"/>
-              </a:lnSpc>
-              <a:spcBef>
-                <a:spcPts val="0"/>
-              </a:spcBef>
-              <a:spcAft>
-                <a:spcPts val="1800"/>
-              </a:spcAft>
-            </a:pPr>
-            <a:r>
-              <a:rPr sz="2200" b="0" i="0">
-                <a:solidFill>
-                  <a:srgbClr val="1A1A1A"/>
-                </a:solidFill>
-                <a:latin typeface="Palatino"/>
-              </a:rPr>
-              <a:t>Each day's range drawn as a pale bar with its close marked on it and the closes joined into a line; the line never reaches the highs and lows that the pale bars show.</a:t>
-            </a:r>
-          </a:p>
-          <a:p>
-            <a:pPr algn="l">
-              <a:lnSpc>
-                <a:spcPct val="115000"/>
-              </a:lnSpc>
-              <a:spcBef>
-                <a:spcPts val="0"/>
-              </a:spcBef>
-              <a:spcAft>
-                <a:spcPts val="0"/>
-              </a:spcAft>
-            </a:pPr>
-            <a:r>
-              <a:rPr sz="1400" b="0" i="1">
-                <a:solidFill>
-                  <a:srgbClr val="818181"/>
-                </a:solidFill>
-                <a:latin typeface="Arial"/>
-              </a:rPr>
-              <a:t>This chart is generated by build/chartkit.py and was not drawn for this build. Rerun the build to place it.</a:t>
-            </a:r>
-          </a:p>
-        </p:txBody>
-      </p:sp>
-      <p:sp>
-        <p:nvSpPr>
-          <p:cNvPr id="10" name="TextBox 9"/>
           <p:cNvSpPr txBox="1"/>
           <p:nvPr/>
         </p:nvSpPr>
@@ -42813,8 +42528,8 @@
         </p:nvSpPr>
         <p:spPr>
           <a:xfrm>
-            <a:off x="2346807" y="1810512"/>
-            <a:ext cx="7498079" cy="3749039"/>
+            <a:off x="778611" y="1810512"/>
+            <a:ext cx="10634472" cy="3749039"/>
           </a:xfrm>
           <a:prstGeom prst="rect">
             <a:avLst/>
@@ -42837,128 +42552,33 @@
           </a:p>
         </p:txBody>
       </p:sp>
-      <p:sp>
-        <p:nvSpPr>
-          <p:cNvPr id="8" name="Rectangle 7"/>
-          <p:cNvSpPr/>
-          <p:nvPr/>
-        </p:nvSpPr>
-        <p:spPr>
-          <a:xfrm>
-            <a:off x="2346807" y="1810512"/>
-            <a:ext cx="7498079" cy="50800"/>
-          </a:xfrm>
-          <a:prstGeom prst="rect">
-            <a:avLst/>
-          </a:prstGeom>
-          <a:solidFill>
-            <a:srgbClr val="F2A900"/>
-          </a:solidFill>
-          <a:ln>
-            <a:noFill/>
-          </a:ln>
-          <a:effectLst/>
-        </p:spPr>
-        <p:txBody>
-          <a:bodyPr rtlCol="0" anchor="ctr"/>
-          <a:lstStyle/>
-          <a:p>
-            <a:pPr algn="ctr"/>
-          </a:p>
-        </p:txBody>
-      </p:sp>
+      <p:pic>
+        <p:nvPicPr>
+          <p:cNvPr id="8" name="Picture 7" descr="chart-c.png"/>
+          <p:cNvPicPr>
+            <a:picLocks noChangeAspect="1"/>
+          </p:cNvPicPr>
+          <p:nvPr/>
+        </p:nvPicPr>
+        <p:blipFill>
+          <a:blip r:embed="rId2"/>
+          <a:stretch>
+            <a:fillRect/>
+          </a:stretch>
+        </p:blipFill>
+        <p:spPr>
+          <a:xfrm>
+            <a:off x="897483" y="1929384"/>
+            <a:ext cx="10396728" cy="3511296"/>
+          </a:xfrm>
+          <a:prstGeom prst="rect">
+            <a:avLst/>
+          </a:prstGeom>
+        </p:spPr>
+      </p:pic>
       <p:sp>
         <p:nvSpPr>
           <p:cNvPr id="9" name="TextBox 8"/>
-          <p:cNvSpPr txBox="1"/>
-          <p:nvPr/>
-        </p:nvSpPr>
-        <p:spPr>
-          <a:xfrm>
-            <a:off x="2895447" y="2450591"/>
-            <a:ext cx="6400799" cy="2651759"/>
-          </a:xfrm>
-          <a:prstGeom prst="rect">
-            <a:avLst/>
-          </a:prstGeom>
-          <a:noFill/>
-        </p:spPr>
-        <p:txBody>
-          <a:bodyPr wrap="square" anchor="t" lIns="0" rIns="0" tIns="0" bIns="0">
-            <a:spAutoFit/>
-          </a:bodyPr>
-          <a:lstStyle/>
-          <a:p>
-            <a:pPr algn="l">
-              <a:lnSpc>
-                <a:spcPct val="100000"/>
-              </a:lnSpc>
-              <a:spcBef>
-                <a:spcPts val="0"/>
-              </a:spcBef>
-              <a:spcAft>
-                <a:spcPts val="1400"/>
-              </a:spcAft>
-            </a:pPr>
-            <a:r>
-              <a:rPr sz="1500" b="1" i="0">
-                <a:solidFill>
-                  <a:srgbClr val="818181"/>
-                </a:solidFill>
-                <a:latin typeface="Arial"/>
-              </a:rPr>
-              <a:t>CHART C</a:t>
-            </a:r>
-          </a:p>
-          <a:p>
-            <a:pPr algn="l">
-              <a:lnSpc>
-                <a:spcPct val="120000"/>
-              </a:lnSpc>
-              <a:spcBef>
-                <a:spcPts val="0"/>
-              </a:spcBef>
-              <a:spcAft>
-                <a:spcPts val="1800"/>
-              </a:spcAft>
-            </a:pPr>
-            <a:r>
-              <a:rPr sz="2200" b="0" i="0">
-                <a:solidFill>
-                  <a:srgbClr val="1A1A1A"/>
-                </a:solidFill>
-                <a:latin typeface="Palatino"/>
-              </a:rPr>
-              <a:t>A price path and, below it, the point and figure columns it makes with a 1 peso box and a 3 box reversal: X's while price rises, O's while it falls, a new column only after a 3 peso reversal.</a:t>
-            </a:r>
-          </a:p>
-          <a:p>
-            <a:pPr algn="l">
-              <a:lnSpc>
-                <a:spcPct val="115000"/>
-              </a:lnSpc>
-              <a:spcBef>
-                <a:spcPts val="0"/>
-              </a:spcBef>
-              <a:spcAft>
-                <a:spcPts val="0"/>
-              </a:spcAft>
-            </a:pPr>
-            <a:r>
-              <a:rPr sz="1400" b="0" i="1">
-                <a:solidFill>
-                  <a:srgbClr val="818181"/>
-                </a:solidFill>
-                <a:latin typeface="Arial"/>
-              </a:rPr>
-              <a:t>This chart is generated by build/chartkit.py and was not drawn for this build. Rerun the build to place it.</a:t>
-            </a:r>
-          </a:p>
-        </p:txBody>
-      </p:sp>
-      <p:sp>
-        <p:nvSpPr>
-          <p:cNvPr id="10" name="TextBox 9"/>
           <p:cNvSpPr txBox="1"/>
           <p:nvPr/>
         </p:nvSpPr>
@@ -45795,8 +45415,8 @@
         </p:nvSpPr>
         <p:spPr>
           <a:xfrm>
-            <a:off x="2346807" y="1810512"/>
-            <a:ext cx="7498079" cy="3749039"/>
+            <a:off x="778611" y="1810512"/>
+            <a:ext cx="10634472" cy="3749039"/>
           </a:xfrm>
           <a:prstGeom prst="rect">
             <a:avLst/>
@@ -45819,128 +45439,33 @@
           </a:p>
         </p:txBody>
       </p:sp>
-      <p:sp>
-        <p:nvSpPr>
-          <p:cNvPr id="8" name="Rectangle 7"/>
-          <p:cNvSpPr/>
-          <p:nvPr/>
-        </p:nvSpPr>
-        <p:spPr>
-          <a:xfrm>
-            <a:off x="2346807" y="1810512"/>
-            <a:ext cx="7498079" cy="50800"/>
-          </a:xfrm>
-          <a:prstGeom prst="rect">
-            <a:avLst/>
-          </a:prstGeom>
-          <a:solidFill>
-            <a:srgbClr val="F2A900"/>
-          </a:solidFill>
-          <a:ln>
-            <a:noFill/>
-          </a:ln>
-          <a:effectLst/>
-        </p:spPr>
-        <p:txBody>
-          <a:bodyPr rtlCol="0" anchor="ctr"/>
-          <a:lstStyle/>
-          <a:p>
-            <a:pPr algn="ctr"/>
-          </a:p>
-        </p:txBody>
-      </p:sp>
+      <p:pic>
+        <p:nvPicPr>
+          <p:cNvPr id="8" name="Picture 7" descr="chart-d.png"/>
+          <p:cNvPicPr>
+            <a:picLocks noChangeAspect="1"/>
+          </p:cNvPicPr>
+          <p:nvPr/>
+        </p:nvPicPr>
+        <p:blipFill>
+          <a:blip r:embed="rId2"/>
+          <a:stretch>
+            <a:fillRect/>
+          </a:stretch>
+        </p:blipFill>
+        <p:spPr>
+          <a:xfrm>
+            <a:off x="897483" y="1929384"/>
+            <a:ext cx="10396728" cy="3511296"/>
+          </a:xfrm>
+          <a:prstGeom prst="rect">
+            <a:avLst/>
+          </a:prstGeom>
+        </p:spPr>
+      </p:pic>
       <p:sp>
         <p:nvSpPr>
           <p:cNvPr id="9" name="TextBox 8"/>
-          <p:cNvSpPr txBox="1"/>
-          <p:nvPr/>
-        </p:nvSpPr>
-        <p:spPr>
-          <a:xfrm>
-            <a:off x="2895447" y="2450591"/>
-            <a:ext cx="6400799" cy="2651759"/>
-          </a:xfrm>
-          <a:prstGeom prst="rect">
-            <a:avLst/>
-          </a:prstGeom>
-          <a:noFill/>
-        </p:spPr>
-        <p:txBody>
-          <a:bodyPr wrap="square" anchor="t" lIns="0" rIns="0" tIns="0" bIns="0">
-            <a:spAutoFit/>
-          </a:bodyPr>
-          <a:lstStyle/>
-          <a:p>
-            <a:pPr algn="l">
-              <a:lnSpc>
-                <a:spcPct val="100000"/>
-              </a:lnSpc>
-              <a:spcBef>
-                <a:spcPts val="0"/>
-              </a:spcBef>
-              <a:spcAft>
-                <a:spcPts val="1400"/>
-              </a:spcAft>
-            </a:pPr>
-            <a:r>
-              <a:rPr sz="1500" b="1" i="0">
-                <a:solidFill>
-                  <a:srgbClr val="818181"/>
-                </a:solidFill>
-                <a:latin typeface="Arial"/>
-              </a:rPr>
-              <a:t>CHART D</a:t>
-            </a:r>
-          </a:p>
-          <a:p>
-            <a:pPr algn="l">
-              <a:lnSpc>
-                <a:spcPct val="120000"/>
-              </a:lnSpc>
-              <a:spcBef>
-                <a:spcPts val="0"/>
-              </a:spcBef>
-              <a:spcAft>
-                <a:spcPts val="1800"/>
-              </a:spcAft>
-            </a:pPr>
-            <a:r>
-              <a:rPr sz="2200" b="0" i="0">
-                <a:solidFill>
-                  <a:srgbClr val="1A1A1A"/>
-                </a:solidFill>
-                <a:latin typeface="Palatino"/>
-              </a:rPr>
-              <a:t>One session's price above its volume, with a mark on the time axis wherever another fixed block of shares has traded: the marks crowd together in the busy hours and spread out in the quiet ones.</a:t>
-            </a:r>
-          </a:p>
-          <a:p>
-            <a:pPr algn="l">
-              <a:lnSpc>
-                <a:spcPct val="115000"/>
-              </a:lnSpc>
-              <a:spcBef>
-                <a:spcPts val="0"/>
-              </a:spcBef>
-              <a:spcAft>
-                <a:spcPts val="0"/>
-              </a:spcAft>
-            </a:pPr>
-            <a:r>
-              <a:rPr sz="1400" b="0" i="1">
-                <a:solidFill>
-                  <a:srgbClr val="818181"/>
-                </a:solidFill>
-                <a:latin typeface="Arial"/>
-              </a:rPr>
-              <a:t>This chart is generated by build/chartkit.py and was not drawn for this build. Rerun the build to place it.</a:t>
-            </a:r>
-          </a:p>
-        </p:txBody>
-      </p:sp>
-      <p:sp>
-        <p:nvSpPr>
-          <p:cNvPr id="10" name="TextBox 9"/>
           <p:cNvSpPr txBox="1"/>
           <p:nvPr/>
         </p:nvSpPr>
@@ -52065,8 +51590,8 @@
         </p:nvSpPr>
         <p:spPr>
           <a:xfrm>
-            <a:off x="2346807" y="1810512"/>
-            <a:ext cx="7498079" cy="3749039"/>
+            <a:off x="778611" y="1810512"/>
+            <a:ext cx="10634472" cy="3749039"/>
           </a:xfrm>
           <a:prstGeom prst="rect">
             <a:avLst/>
@@ -52089,128 +51614,33 @@
           </a:p>
         </p:txBody>
       </p:sp>
-      <p:sp>
-        <p:nvSpPr>
-          <p:cNvPr id="8" name="Rectangle 7"/>
-          <p:cNvSpPr/>
-          <p:nvPr/>
-        </p:nvSpPr>
-        <p:spPr>
-          <a:xfrm>
-            <a:off x="2346807" y="1810512"/>
-            <a:ext cx="7498079" cy="50800"/>
-          </a:xfrm>
-          <a:prstGeom prst="rect">
-            <a:avLst/>
-          </a:prstGeom>
-          <a:solidFill>
-            <a:srgbClr val="F2A900"/>
-          </a:solidFill>
-          <a:ln>
-            <a:noFill/>
-          </a:ln>
-          <a:effectLst/>
-        </p:spPr>
-        <p:txBody>
-          <a:bodyPr rtlCol="0" anchor="ctr"/>
-          <a:lstStyle/>
-          <a:p>
-            <a:pPr algn="ctr"/>
-          </a:p>
-        </p:txBody>
-      </p:sp>
+      <p:pic>
+        <p:nvPicPr>
+          <p:cNvPr id="8" name="Picture 7" descr="chart-e.png"/>
+          <p:cNvPicPr>
+            <a:picLocks noChangeAspect="1"/>
+          </p:cNvPicPr>
+          <p:nvPr/>
+        </p:nvPicPr>
+        <p:blipFill>
+          <a:blip r:embed="rId2"/>
+          <a:stretch>
+            <a:fillRect/>
+          </a:stretch>
+        </p:blipFill>
+        <p:spPr>
+          <a:xfrm>
+            <a:off x="897483" y="1929384"/>
+            <a:ext cx="10396728" cy="3511296"/>
+          </a:xfrm>
+          <a:prstGeom prst="rect">
+            <a:avLst/>
+          </a:prstGeom>
+        </p:spPr>
+      </p:pic>
       <p:sp>
         <p:nvSpPr>
           <p:cNvPr id="9" name="TextBox 8"/>
-          <p:cNvSpPr txBox="1"/>
-          <p:nvPr/>
-        </p:nvSpPr>
-        <p:spPr>
-          <a:xfrm>
-            <a:off x="2895447" y="2450591"/>
-            <a:ext cx="6400799" cy="2651759"/>
-          </a:xfrm>
-          <a:prstGeom prst="rect">
-            <a:avLst/>
-          </a:prstGeom>
-          <a:noFill/>
-        </p:spPr>
-        <p:txBody>
-          <a:bodyPr wrap="square" anchor="t" lIns="0" rIns="0" tIns="0" bIns="0">
-            <a:spAutoFit/>
-          </a:bodyPr>
-          <a:lstStyle/>
-          <a:p>
-            <a:pPr algn="l">
-              <a:lnSpc>
-                <a:spcPct val="100000"/>
-              </a:lnSpc>
-              <a:spcBef>
-                <a:spcPts val="0"/>
-              </a:spcBef>
-              <a:spcAft>
-                <a:spcPts val="1400"/>
-              </a:spcAft>
-            </a:pPr>
-            <a:r>
-              <a:rPr sz="1500" b="1" i="0">
-                <a:solidFill>
-                  <a:srgbClr val="818181"/>
-                </a:solidFill>
-                <a:latin typeface="Arial"/>
-              </a:rPr>
-              <a:t>CHART E</a:t>
-            </a:r>
-          </a:p>
-          <a:p>
-            <a:pPr algn="l">
-              <a:lnSpc>
-                <a:spcPct val="120000"/>
-              </a:lnSpc>
-              <a:spcBef>
-                <a:spcPts val="0"/>
-              </a:spcBef>
-              <a:spcAft>
-                <a:spcPts val="1800"/>
-              </a:spcAft>
-            </a:pPr>
-            <a:r>
-              <a:rPr sz="2200" b="0" i="0">
-                <a:solidFill>
-                  <a:srgbClr val="1A1A1A"/>
-                </a:solidFill>
-                <a:latin typeface="Palatino"/>
-              </a:rPr>
-              <a:t>Price levels from 10 to 100 pesos on a linear, a square root and a ratio axis side by side, with the rises from 10 to 20 and from 90 to 100 marked on each.</a:t>
-            </a:r>
-          </a:p>
-          <a:p>
-            <a:pPr algn="l">
-              <a:lnSpc>
-                <a:spcPct val="115000"/>
-              </a:lnSpc>
-              <a:spcBef>
-                <a:spcPts val="0"/>
-              </a:spcBef>
-              <a:spcAft>
-                <a:spcPts val="0"/>
-              </a:spcAft>
-            </a:pPr>
-            <a:r>
-              <a:rPr sz="1400" b="0" i="1">
-                <a:solidFill>
-                  <a:srgbClr val="818181"/>
-                </a:solidFill>
-                <a:latin typeface="Arial"/>
-              </a:rPr>
-              <a:t>This chart is generated by build/chartkit.py and was not drawn for this build. Rerun the build to place it.</a:t>
-            </a:r>
-          </a:p>
-        </p:txBody>
-      </p:sp>
-      <p:sp>
-        <p:nvSpPr>
-          <p:cNvPr id="10" name="TextBox 9"/>
           <p:cNvSpPr txBox="1"/>
           <p:nvPr/>
         </p:nvSpPr>
